--- a/builder/assets/reference-pages/hr-eligibility-matrix.pptx
+++ b/builder/assets/reference-pages/hr-eligibility-matrix.pptx
@@ -1097,7 +1097,7 @@
                   <a:srgbClr val="15375F"/>
                 </a:solidFill>
               </a:rPr>
-              <a:t>资格判断准确率 94.6%，但人工复核率 11.8%，异地新员工仍是主要兜底场景</a:t>
+              <a:t>Qualification Judgment Accuracy 94.6%, but the manual review rate 11.8%, new employees from different places are still the main scenario</a:t>
             </a:r>
           </a:p>
         </p:txBody>
@@ -1151,7 +1151,7 @@
                   <a:srgbClr val="E8872D"/>
                 </a:solidFill>
               </a:rPr>
-              <a:t>判断准确率</a:t>
+              <a:t>Judgment accuracy</a:t>
             </a:r>
           </a:p>
           <a:p xmlns:a="http://schemas.openxmlformats.org/drawingml/2006/main">
@@ -1185,7 +1185,7 @@
                   <a:srgbClr val="E8872D"/>
                 </a:solidFill>
               </a:rPr>
-              <a:t>目标 98%</a:t>
+              <a:t>target 98%</a:t>
             </a:r>
           </a:p>
         </p:txBody>
@@ -1239,7 +1239,7 @@
                   <a:srgbClr val="15375F"/>
                 </a:solidFill>
               </a:rPr>
-              <a:t>人工复核率</a:t>
+              <a:t>Manual review rate</a:t>
             </a:r>
           </a:p>
           <a:p xmlns:a="http://schemas.openxmlformats.org/drawingml/2006/main">
@@ -1273,7 +1273,7 @@
                   <a:srgbClr val="15375F"/>
                 </a:solidFill>
               </a:rPr>
-              <a:t>目标 &lt;5%</a:t>
+              <a:t>target &lt;5%</a:t>
             </a:r>
           </a:p>
         </p:txBody>
@@ -1327,7 +1327,7 @@
                   <a:srgbClr val="15375F"/>
                 </a:solidFill>
               </a:rPr>
-              <a:t>首次解决率</a:t>
+              <a:t>first time resolution rate</a:t>
             </a:r>
           </a:p>
           <a:p xmlns:a="http://schemas.openxmlformats.org/drawingml/2006/main">
@@ -1361,7 +1361,7 @@
                   <a:srgbClr val="15375F"/>
                 </a:solidFill>
               </a:rPr>
-              <a:t>目标 95%</a:t>
+              <a:t>target 95%</a:t>
             </a:r>
           </a:p>
         </p:txBody>
@@ -1450,7 +1450,7 @@
                   <a:srgbClr val="15375F"/>
                 </a:solidFill>
               </a:rPr>
-              <a:t>福利</a:t>
+              <a:t>welfare</a:t>
             </a:r>
           </a:p>
         </p:txBody>
@@ -1504,7 +1504,7 @@
                   <a:srgbClr val="15375F"/>
                 </a:solidFill>
               </a:rPr>
-              <a:t>休假</a:t>
+              <a:t>vacation</a:t>
             </a:r>
           </a:p>
         </p:txBody>
@@ -1558,7 +1558,7 @@
                   <a:srgbClr val="15375F"/>
                 </a:solidFill>
               </a:rPr>
-              <a:t>薪酬</a:t>
+              <a:t>Salary</a:t>
             </a:r>
           </a:p>
         </p:txBody>
@@ -1612,7 +1612,7 @@
                   <a:srgbClr val="15375F"/>
                 </a:solidFill>
               </a:rPr>
-              <a:t>培训</a:t>
+              <a:t>training</a:t>
             </a:r>
           </a:p>
         </p:txBody>
@@ -1666,7 +1666,7 @@
                   <a:srgbClr val="15375F"/>
                 </a:solidFill>
               </a:rPr>
-              <a:t>证明</a:t>
+              <a:t>prove</a:t>
             </a:r>
           </a:p>
         </p:txBody>
@@ -1720,7 +1720,7 @@
                   <a:srgbClr val="15375F"/>
                 </a:solidFill>
               </a:rPr>
-              <a:t>异地政策</a:t>
+              <a:t>Off-site policy</a:t>
             </a:r>
           </a:p>
         </p:txBody>
@@ -1770,7 +1770,7 @@
                   <a:srgbClr val="15375F"/>
                 </a:solidFill>
               </a:rPr>
-              <a:t>司龄 &lt;1 年</a:t>
+              <a:t>Si Ling &lt;1 year</a:t>
             </a:r>
           </a:p>
         </p:txBody>
@@ -1824,7 +1824,7 @@
                   <a:srgbClr val="172033"/>
                 </a:solidFill>
               </a:rPr>
-              <a:t>条件覆盖</a:t>
+              <a:t>condition coverage</a:t>
             </a:r>
           </a:p>
         </p:txBody>
@@ -1878,7 +1878,7 @@
                   <a:srgbClr val="172033"/>
                 </a:solidFill>
               </a:rPr>
-              <a:t>条件覆盖</a:t>
+              <a:t>condition coverage</a:t>
             </a:r>
           </a:p>
         </p:txBody>
@@ -1932,7 +1932,7 @@
                   <a:srgbClr val="172033"/>
                 </a:solidFill>
               </a:rPr>
-              <a:t>自动判断</a:t>
+              <a:t>Automatic judgment</a:t>
             </a:r>
           </a:p>
         </p:txBody>
@@ -1986,7 +1986,7 @@
                   <a:srgbClr val="172033"/>
                 </a:solidFill>
               </a:rPr>
-              <a:t>条件覆盖</a:t>
+              <a:t>condition coverage</a:t>
             </a:r>
           </a:p>
         </p:txBody>
@@ -2040,7 +2040,7 @@
                   <a:srgbClr val="172033"/>
                 </a:solidFill>
               </a:rPr>
-              <a:t>自动判断</a:t>
+              <a:t>Automatic judgment</a:t>
             </a:r>
           </a:p>
         </p:txBody>
@@ -2094,7 +2094,7 @@
                   <a:srgbClr val="E8872D"/>
                 </a:solidFill>
               </a:rPr>
-              <a:t>需人工</a:t>
+              <a:t>Requires labor</a:t>
             </a:r>
           </a:p>
         </p:txBody>
@@ -2198,7 +2198,7 @@
                   <a:srgbClr val="172033"/>
                 </a:solidFill>
               </a:rPr>
-              <a:t>自动判断</a:t>
+              <a:t>Automatic judgment</a:t>
             </a:r>
           </a:p>
         </p:txBody>
@@ -2252,7 +2252,7 @@
                   <a:srgbClr val="172033"/>
                 </a:solidFill>
               </a:rPr>
-              <a:t>自动判断</a:t>
+              <a:t>Automatic judgment</a:t>
             </a:r>
           </a:p>
         </p:txBody>
@@ -2306,7 +2306,7 @@
                   <a:srgbClr val="172033"/>
                 </a:solidFill>
               </a:rPr>
-              <a:t>条件覆盖</a:t>
+              <a:t>condition coverage</a:t>
             </a:r>
           </a:p>
         </p:txBody>
@@ -2360,7 +2360,7 @@
                   <a:srgbClr val="172033"/>
                 </a:solidFill>
               </a:rPr>
-              <a:t>自动判断</a:t>
+              <a:t>Automatic judgment</a:t>
             </a:r>
           </a:p>
         </p:txBody>
@@ -2414,7 +2414,7 @@
                   <a:srgbClr val="172033"/>
                 </a:solidFill>
               </a:rPr>
-              <a:t>自动判断</a:t>
+              <a:t>Automatic judgment</a:t>
             </a:r>
           </a:p>
         </p:txBody>
@@ -2468,7 +2468,7 @@
                   <a:srgbClr val="172033"/>
                 </a:solidFill>
               </a:rPr>
-              <a:t>条件覆盖</a:t>
+              <a:t>condition coverage</a:t>
             </a:r>
           </a:p>
         </p:txBody>
@@ -2518,7 +2518,7 @@
                   <a:srgbClr val="15375F"/>
                 </a:solidFill>
               </a:rPr>
-              <a:t>异地员工</a:t>
+              <a:t>Remote employees</a:t>
             </a:r>
           </a:p>
         </p:txBody>
@@ -2572,7 +2572,7 @@
                   <a:srgbClr val="172033"/>
                 </a:solidFill>
               </a:rPr>
-              <a:t>条件覆盖</a:t>
+              <a:t>condition coverage</a:t>
             </a:r>
           </a:p>
         </p:txBody>
@@ -2626,7 +2626,7 @@
                   <a:srgbClr val="172033"/>
                 </a:solidFill>
               </a:rPr>
-              <a:t>条件覆盖</a:t>
+              <a:t>condition coverage</a:t>
             </a:r>
           </a:p>
         </p:txBody>
@@ -2680,7 +2680,7 @@
                   <a:srgbClr val="172033"/>
                 </a:solidFill>
               </a:rPr>
-              <a:t>条件覆盖</a:t>
+              <a:t>condition coverage</a:t>
             </a:r>
           </a:p>
         </p:txBody>
@@ -2734,7 +2734,7 @@
                   <a:srgbClr val="172033"/>
                 </a:solidFill>
               </a:rPr>
-              <a:t>条件覆盖</a:t>
+              <a:t>condition coverage</a:t>
             </a:r>
           </a:p>
         </p:txBody>
@@ -2788,7 +2788,7 @@
                   <a:srgbClr val="172033"/>
                 </a:solidFill>
               </a:rPr>
-              <a:t>条件覆盖</a:t>
+              <a:t>condition coverage</a:t>
             </a:r>
           </a:p>
         </p:txBody>
@@ -2842,7 +2842,7 @@
                   <a:srgbClr val="E8872D"/>
                 </a:solidFill>
               </a:rPr>
-              <a:t>需人工</a:t>
+              <a:t>Requires labor</a:t>
             </a:r>
           </a:p>
         </p:txBody>
@@ -2892,7 +2892,7 @@
                   <a:srgbClr val="15375F"/>
                 </a:solidFill>
               </a:rPr>
-              <a:t>管理人员</a:t>
+              <a:t>managers</a:t>
             </a:r>
           </a:p>
         </p:txBody>
@@ -2946,7 +2946,7 @@
                   <a:srgbClr val="172033"/>
                 </a:solidFill>
               </a:rPr>
-              <a:t>自动判断</a:t>
+              <a:t>Automatic judgment</a:t>
             </a:r>
           </a:p>
         </p:txBody>
@@ -3000,7 +3000,7 @@
                   <a:srgbClr val="172033"/>
                 </a:solidFill>
               </a:rPr>
-              <a:t>自动判断</a:t>
+              <a:t>Automatic judgment</a:t>
             </a:r>
           </a:p>
         </p:txBody>
@@ -3054,7 +3054,7 @@
                   <a:srgbClr val="172033"/>
                 </a:solidFill>
               </a:rPr>
-              <a:t>自动判断</a:t>
+              <a:t>Automatic judgment</a:t>
             </a:r>
           </a:p>
         </p:txBody>
@@ -3108,7 +3108,7 @@
                   <a:srgbClr val="172033"/>
                 </a:solidFill>
               </a:rPr>
-              <a:t>条件覆盖</a:t>
+              <a:t>condition coverage</a:t>
             </a:r>
           </a:p>
         </p:txBody>
@@ -3162,7 +3162,7 @@
                   <a:srgbClr val="172033"/>
                 </a:solidFill>
               </a:rPr>
-              <a:t>自动判断</a:t>
+              <a:t>Automatic judgment</a:t>
             </a:r>
           </a:p>
         </p:txBody>
@@ -3216,7 +3216,7 @@
                   <a:srgbClr val="172033"/>
                 </a:solidFill>
               </a:rPr>
-              <a:t>条件覆盖</a:t>
+              <a:t>condition coverage</a:t>
             </a:r>
           </a:p>
         </p:txBody>
@@ -3266,7 +3266,7 @@
                   <a:srgbClr val="15375F"/>
                 </a:solidFill>
               </a:rPr>
-              <a:t>派遣员工</a:t>
+              <a:t>Dispatch employees</a:t>
             </a:r>
           </a:p>
         </p:txBody>
@@ -3320,7 +3320,7 @@
                   <a:srgbClr val="E8872D"/>
                 </a:solidFill>
               </a:rPr>
-              <a:t>需人工</a:t>
+              <a:t>Requires labor</a:t>
             </a:r>
           </a:p>
         </p:txBody>
@@ -3374,7 +3374,7 @@
                   <a:srgbClr val="172033"/>
                 </a:solidFill>
               </a:rPr>
-              <a:t>条件覆盖</a:t>
+              <a:t>condition coverage</a:t>
             </a:r>
           </a:p>
         </p:txBody>
@@ -3428,7 +3428,7 @@
                   <a:srgbClr val="E8872D"/>
                 </a:solidFill>
               </a:rPr>
-              <a:t>需人工</a:t>
+              <a:t>Requires labor</a:t>
             </a:r>
           </a:p>
         </p:txBody>
@@ -3482,7 +3482,7 @@
                   <a:srgbClr val="172033"/>
                 </a:solidFill>
               </a:rPr>
-              <a:t>条件覆盖</a:t>
+              <a:t>condition coverage</a:t>
             </a:r>
           </a:p>
         </p:txBody>
@@ -3536,7 +3536,7 @@
                   <a:srgbClr val="172033"/>
                 </a:solidFill>
               </a:rPr>
-              <a:t>条件覆盖</a:t>
+              <a:t>condition coverage</a:t>
             </a:r>
           </a:p>
         </p:txBody>
@@ -3590,14 +3590,14 @@
                   <a:srgbClr val="E8872D"/>
                 </a:solidFill>
               </a:rPr>
-              <a:t>需人工</a:t>
-            </a:r>
-          </a:p>
-        </p:txBody>
-      </p:sp>
-      <p:sp>
-        <p:nvSpPr>
-          <p:cNvPr id="47" name="发现与动作-rail">
+              <a:t>Requires labor</a:t>
+            </a:r>
+          </a:p>
+        </p:txBody>
+      </p:sp>
+      <p:sp>
+        <p:nvSpPr>
+          <p:cNvPr id="47" name="discovery and action-rail">
             <a:extLst xmlns:a="http://schemas.openxmlformats.org/drawingml/2006/main">
               <a:ext uri="{FF2B5EF4-FFF2-40B4-BE49-F238E27FC236}">
                 <a16:creationId xmlns:a16="http://schemas.microsoft.com/office/drawing/2014/main" id="{D6C50059-C0A5-4718-98E0-C956616D2673}"/>
@@ -3632,7 +3632,7 @@
       </p:sp>
       <p:sp>
         <p:nvSpPr>
-          <p:cNvPr id="48" name="发现与动作-title">
+          <p:cNvPr id="48" name="discovery and action-title">
             <a:extLst xmlns:a="http://schemas.openxmlformats.org/drawingml/2006/main">
               <a:ext uri="{FF2B5EF4-FFF2-40B4-BE49-F238E27FC236}">
                 <a16:creationId xmlns:a16="http://schemas.microsoft.com/office/drawing/2014/main" id="{B74C5E58-767E-4363-B5A2-98171B99B4F7}"/>
@@ -3675,14 +3675,14 @@
                   <a:srgbClr val="15375F"/>
                 </a:solidFill>
               </a:rPr>
-              <a:t>发现与动作</a:t>
-            </a:r>
-          </a:p>
-        </p:txBody>
-      </p:sp>
-      <p:sp>
-        <p:nvSpPr>
-          <p:cNvPr id="49" name="发现与动作-1">
+              <a:t>discovery and action</a:t>
+            </a:r>
+          </a:p>
+        </p:txBody>
+      </p:sp>
+      <p:sp>
+        <p:nvSpPr>
+          <p:cNvPr id="49" name="discovery and action-1">
             <a:extLst xmlns:a="http://schemas.openxmlformats.org/drawingml/2006/main">
               <a:ext uri="{FF2B5EF4-FFF2-40B4-BE49-F238E27FC236}">
                 <a16:creationId xmlns:a16="http://schemas.microsoft.com/office/drawing/2014/main" id="{A632D959-4ACF-42DB-A529-8A635DC359BE}"/>
@@ -3731,14 +3731,14 @@
                   <a:srgbClr val="172033"/>
                 </a:solidFill>
               </a:rPr>
-              <a:t>1  低准确率集中在异地政策与新员工</a:t>
-            </a:r>
-          </a:p>
-        </p:txBody>
-      </p:sp>
-      <p:sp>
-        <p:nvSpPr>
-          <p:cNvPr id="50" name="发现与动作-2">
+              <a:t>1  Low accuracy rates focus on off-site policies and new hires</a:t>
+            </a:r>
+          </a:p>
+        </p:txBody>
+      </p:sp>
+      <p:sp>
+        <p:nvSpPr>
+          <p:cNvPr id="50" name="discovery and action-2">
             <a:extLst xmlns:a="http://schemas.openxmlformats.org/drawingml/2006/main">
               <a:ext uri="{FF2B5EF4-FFF2-40B4-BE49-F238E27FC236}">
                 <a16:creationId xmlns:a16="http://schemas.microsoft.com/office/drawing/2014/main" id="{981DBA7A-B380-4F06-A4E5-641776B89138}"/>
@@ -3787,14 +3787,14 @@
                   <a:srgbClr val="172033"/>
                 </a:solidFill>
               </a:rPr>
-              <a:t>2  规则不足和资料缺口解释多数人工复核</a:t>
-            </a:r>
-          </a:p>
-        </p:txBody>
-      </p:sp>
-      <p:sp>
-        <p:nvSpPr>
-          <p:cNvPr id="51" name="发现与动作-3">
+              <a:t>2  Insufficient rules and data gaps explained by mostly manual review</a:t>
+            </a:r>
+          </a:p>
+        </p:txBody>
+      </p:sp>
+      <p:sp>
+        <p:nvSpPr>
+          <p:cNvPr id="51" name="discovery and action-3">
             <a:extLst xmlns:a="http://schemas.openxmlformats.org/drawingml/2006/main">
               <a:ext uri="{FF2B5EF4-FFF2-40B4-BE49-F238E27FC236}">
                 <a16:creationId xmlns:a16="http://schemas.microsoft.com/office/drawing/2014/main" id="{FAB7A61B-319D-4E45-9C74-82C45AADC515}"/>
@@ -3843,7 +3843,7 @@
                   <a:srgbClr val="172033"/>
                 </a:solidFill>
               </a:rPr>
-              <a:t>3  优先补齐异地与司龄相关规则</a:t>
+              <a:t>3  Prioritize the completion of rules related to different places and seniority</a:t>
             </a:r>
           </a:p>
         </p:txBody>
@@ -3899,7 +3899,7 @@
                   <a:srgbClr val="15375F"/>
                 </a:solidFill>
               </a:rPr>
-              <a:t>HR COE 统一规则口径，HRSSC 建立人工兜底与时限</a:t>
+              <a:t>HR COE Unify the rules and caliber,HRSSC Establish manual guarantees and time limits</a:t>
             </a:r>
           </a:p>
         </p:txBody>
